--- a/slides/decks/s10-sos-vod-endothelial.pptx
+++ b/slides/decks/s10-sos-vod-endothelial.pptx
@@ -132,13 +132,13 @@
   <p:extLst>
     <p:ext uri="{521415D9-36F7-43E2-AB2F-B90AF26B5E84}">
       <p14:sectionLst xmlns:p14="http://schemas.microsoft.com/office/powerpoint/2010/main">
-        <p14:section name="Opening" id="{bccc075e-8604-4e17-aea2-dbc3117d5911}">
+        <p14:section name="Opening" id="{70df1b93-c714-fded-578f-e4652b4bb8c6}">
           <p14:sldIdLst>
             <p14:sldId id="256"/>
             <p14:sldId id="257"/>
           </p14:sldIdLst>
         </p14:section>
-        <p14:section name="SOS/VOD" id="{f9583330-4d3d-55c6-2ca1-a1ac53271846}">
+        <p14:section name="SOS/VOD" id="{53531c44-307e-d648-c152-b1d332f9139e}">
           <p14:sldIdLst>
             <p14:sldId id="258"/>
             <p14:sldId id="259"/>
@@ -149,20 +149,20 @@
             <p14:sldId id="264"/>
           </p14:sldIdLst>
         </p14:section>
-        <p14:section name="Endothelial syndromes" id="{5b225be3-a052-315d-a56a-589674ba3ee9}">
+        <p14:section name="Endothelial syndromes" id="{868cb534-5fde-ff10-96e5-a8b62c2059eb}">
           <p14:sldIdLst>
             <p14:sldId id="265"/>
             <p14:sldId id="266"/>
           </p14:sldIdLst>
         </p14:section>
-        <p14:section name="TA-TMA and PRES" id="{eedf8de2-8e0a-cf46-3362-2b63e24e206f}">
+        <p14:section name="TA-TMA and PRES" id="{ec70d230-fdea-e476-d689-67cfc7267cb4}">
           <p14:sldIdLst>
             <p14:sldId id="267"/>
             <p14:sldId id="268"/>
             <p14:sldId id="269"/>
           </p14:sldIdLst>
         </p14:section>
-        <p14:section name="Board questions" id="{ce54f04b-c7a3-0a35-b691-41c7ad81ca4e}">
+        <p14:section name="Board questions" id="{2cde9259-8e9b-809c-8360-8b1f9d3f2f7d}">
           <p14:sldIdLst>
             <p14:sldId id="270"/>
             <p14:sldId id="271"/>
@@ -172,13 +172,13 @@
             <p14:sldId id="275"/>
           </p14:sldIdLst>
         </p14:section>
-        <p14:section name="References" id="{c7bfef66-4f25-7abe-3760-abe0a55a4638}">
+        <p14:section name="References" id="{875d898c-b8b9-7b14-ca44-5c032d8dc133}">
           <p14:sldIdLst>
             <p14:sldId id="276"/>
             <p14:sldId id="277"/>
           </p14:sldIdLst>
         </p14:section>
-        <p14:section name="Backup" id="{36dfda9f-e0d3-bb07-d311-5a1573abe94f}">
+        <p14:section name="Backup" id="{062c5437-f4a2-c979-6994-e74f987bf3b2}">
           <p14:sldIdLst>
             <p14:sldId id="278"/>
             <p14:sldId id="279"/>
